--- a/docs/presentations/v3/02-joystick-control.pptx
+++ b/docs/presentations/v3/02-joystick-control.pptx
@@ -3932,7 +3932,7 @@
               <a:buNone/>
             </a:pPr>
             <a:r>
-              <a:rPr lang="en-US" sz="1900" dirty="0">
+              <a:rPr lang="en-US" sz="1500" dirty="0">
                 <a:solidFill>
                   <a:srgbClr val="9EF01A"/>
                 </a:solidFill>
@@ -3942,7 +3942,7 @@
               </a:rPr>
               <a:t>DoubleSupplier stickReader = () -&gt; robot.driverController.getLeftY();</a:t>
             </a:r>
-            <a:endParaRPr lang="en-US" sz="1900" dirty="0"/>
+            <a:endParaRPr lang="en-US" sz="1500" dirty="0"/>
           </a:p>
           <a:p>
             <a:pPr indent="0" marL="0">
@@ -3952,7 +3952,7 @@
               <a:buNone/>
             </a:pPr>
             <a:r>
-              <a:rPr lang="en-US" sz="1900" dirty="0">
+              <a:rPr lang="en-US" sz="1500" dirty="0">
                 <a:solidFill>
                   <a:srgbClr val="D7E3F4"/>
                 </a:solidFill>
@@ -3962,7 +3962,7 @@
               </a:rPr>
               <a:t>double position = stickReader.getAsDouble();  // runs the stored code now</a:t>
             </a:r>
-            <a:endParaRPr lang="en-US" sz="1900" dirty="0"/>
+            <a:endParaRPr lang="en-US" sz="1500" dirty="0"/>
           </a:p>
         </p:txBody>
       </p:sp>
@@ -4337,11 +4337,11 @@
         <p:spPr>
           <a:xfrm>
             <a:off x="640080" y="1600200"/>
-            <a:ext cx="10881360" cy="2834640"/>
+            <a:ext cx="10881360" cy="2651760"/>
           </a:xfrm>
           <a:prstGeom prst="roundRect">
             <a:avLst>
-              <a:gd name="adj" fmla="val 3871"/>
+              <a:gd name="adj" fmla="val 4138"/>
             </a:avLst>
           </a:prstGeom>
           <a:solidFill>
@@ -4426,7 +4426,7 @@
         <p:spPr>
           <a:xfrm>
             <a:off x="914400" y="1801368"/>
-            <a:ext cx="10195560" cy="2468880"/>
+            <a:ext cx="10195560" cy="2286000"/>
           </a:xfrm>
           <a:prstGeom prst="rect">
             <a:avLst/>
@@ -4445,7 +4445,7 @@
               <a:buNone/>
             </a:pPr>
             <a:r>
-              <a:rPr lang="en-US" sz="1800" dirty="0">
+              <a:rPr lang="en-US" sz="1400" dirty="0">
                 <a:solidFill>
                   <a:srgbClr val="7FA8C9"/>
                 </a:solidFill>
@@ -4455,7 +4455,7 @@
               </a:rPr>
               <a:t>/** Drives continuously using a live speed source (e.g. a joystick axis). */</a:t>
             </a:r>
-            <a:endParaRPr lang="en-US" sz="1800" dirty="0"/>
+            <a:endParaRPr lang="en-US" sz="1400" dirty="0"/>
           </a:p>
           <a:p>
             <a:pPr indent="0" marL="0">
@@ -4465,7 +4465,7 @@
               <a:buNone/>
             </a:pPr>
             <a:r>
-              <a:rPr lang="en-US" sz="1800" dirty="0">
+              <a:rPr lang="en-US" sz="1400" dirty="0">
                 <a:solidFill>
                   <a:srgbClr val="FFD166"/>
                 </a:solidFill>
@@ -4475,7 +4475,7 @@
               </a:rPr>
               <a:t>public Command driveWithJoystick(DoubleSupplier speedSupplier) {</a:t>
             </a:r>
-            <a:endParaRPr lang="en-US" sz="1800" dirty="0"/>
+            <a:endParaRPr lang="en-US" sz="1400" dirty="0"/>
           </a:p>
           <a:p>
             <a:pPr indent="0" marL="0">
@@ -4485,7 +4485,7 @@
               <a:buNone/>
             </a:pPr>
             <a:r>
-              <a:rPr lang="en-US" sz="1800" dirty="0">
+              <a:rPr lang="en-US" sz="1400" dirty="0">
                 <a:solidFill>
                   <a:srgbClr val="D7E3F4"/>
                 </a:solidFill>
@@ -4495,7 +4495,7 @@
               </a:rPr>
               <a:t>  return runRepeatedly(() -&gt; {</a:t>
             </a:r>
-            <a:endParaRPr lang="en-US" sz="1800" dirty="0"/>
+            <a:endParaRPr lang="en-US" sz="1400" dirty="0"/>
           </a:p>
           <a:p>
             <a:pPr indent="0" marL="0">
@@ -4505,7 +4505,7 @@
               <a:buNone/>
             </a:pPr>
             <a:r>
-              <a:rPr lang="en-US" sz="1800" dirty="0">
+              <a:rPr lang="en-US" sz="1400" dirty="0">
                 <a:solidFill>
                   <a:srgbClr val="D7E3F4"/>
                 </a:solidFill>
@@ -4515,7 +4515,7 @@
               </a:rPr>
               <a:t>    double raw = speedSupplier.getAsDouble();   // fetch fresh value this tick</a:t>
             </a:r>
-            <a:endParaRPr lang="en-US" sz="1800" dirty="0"/>
+            <a:endParaRPr lang="en-US" sz="1400" dirty="0"/>
           </a:p>
           <a:p>
             <a:pPr indent="0" marL="0">
@@ -4525,7 +4525,7 @@
               <a:buNone/>
             </a:pPr>
             <a:r>
-              <a:rPr lang="en-US" sz="1800" dirty="0">
+              <a:rPr lang="en-US" sz="1400" dirty="0">
                 <a:solidFill>
                   <a:srgbClr val="D7E3F4"/>
                 </a:solidFill>
@@ -4535,7 +4535,7 @@
               </a:rPr>
               <a:t>    double speed = applyDeadband(raw, 0.1);     // clean it up</a:t>
             </a:r>
-            <a:endParaRPr lang="en-US" sz="1800" dirty="0"/>
+            <a:endParaRPr lang="en-US" sz="1400" dirty="0"/>
           </a:p>
           <a:p>
             <a:pPr indent="0" marL="0">
@@ -4545,7 +4545,7 @@
               <a:buNone/>
             </a:pPr>
             <a:r>
-              <a:rPr lang="en-US" sz="1800" dirty="0">
+              <a:rPr lang="en-US" sz="1400" dirty="0">
                 <a:solidFill>
                   <a:srgbClr val="D7E3F4"/>
                 </a:solidFill>
@@ -4555,7 +4555,7 @@
               </a:rPr>
               <a:t>    m_driveMotor.setThrottle(speed);</a:t>
             </a:r>
-            <a:endParaRPr lang="en-US" sz="1800" dirty="0"/>
+            <a:endParaRPr lang="en-US" sz="1400" dirty="0"/>
           </a:p>
           <a:p>
             <a:pPr indent="0" marL="0">
@@ -4565,7 +4565,7 @@
               <a:buNone/>
             </a:pPr>
             <a:r>
-              <a:rPr lang="en-US" sz="1800" dirty="0">
+              <a:rPr lang="en-US" sz="1400" dirty="0">
                 <a:solidFill>
                   <a:srgbClr val="9EF01A"/>
                 </a:solidFill>
@@ -4575,7 +4575,7 @@
               </a:rPr>
               <a:t>  }).named("Drive With Joystick");</a:t>
             </a:r>
-            <a:endParaRPr lang="en-US" sz="1800" dirty="0"/>
+            <a:endParaRPr lang="en-US" sz="1400" dirty="0"/>
           </a:p>
           <a:p>
             <a:pPr indent="0" marL="0">
@@ -4585,7 +4585,7 @@
               <a:buNone/>
             </a:pPr>
             <a:r>
-              <a:rPr lang="en-US" sz="1800" dirty="0">
+              <a:rPr lang="en-US" sz="1400" dirty="0">
                 <a:solidFill>
                   <a:srgbClr val="D7E3F4"/>
                 </a:solidFill>
@@ -4595,7 +4595,7 @@
               </a:rPr>
               <a:t>}</a:t>
             </a:r>
-            <a:endParaRPr lang="en-US" sz="1800" dirty="0"/>
+            <a:endParaRPr lang="en-US" sz="1400" dirty="0"/>
           </a:p>
         </p:txBody>
       </p:sp>
@@ -4927,12 +4927,12 @@
         </p:nvSpPr>
         <p:spPr>
           <a:xfrm>
-            <a:off x="640080" y="1600200"/>
-            <a:ext cx="6035040" cy="2743200"/>
+            <a:off x="640080" y="1554480"/>
+            <a:ext cx="10881360" cy="2468880"/>
           </a:xfrm>
           <a:prstGeom prst="roundRect">
             <a:avLst>
-              <a:gd name="adj" fmla="val 4000"/>
+              <a:gd name="adj" fmla="val 4444"/>
             </a:avLst>
           </a:prstGeom>
           <a:solidFill>
@@ -4956,7 +4956,7 @@
         </p:nvSpPr>
         <p:spPr>
           <a:xfrm>
-            <a:off x="6364224" y="1746504"/>
+            <a:off x="11210544" y="1700784"/>
             <a:ext cx="128016" cy="128016"/>
           </a:xfrm>
           <a:prstGeom prst="ellipse">
@@ -4976,7 +4976,7 @@
         </p:nvSpPr>
         <p:spPr>
           <a:xfrm>
-            <a:off x="6364224" y="1947672"/>
+            <a:off x="11210544" y="1901952"/>
             <a:ext cx="128016" cy="128016"/>
           </a:xfrm>
           <a:prstGeom prst="ellipse">
@@ -4996,7 +4996,7 @@
         </p:nvSpPr>
         <p:spPr>
           <a:xfrm>
-            <a:off x="6364224" y="2148840"/>
+            <a:off x="11210544" y="2103120"/>
             <a:ext cx="128016" cy="128016"/>
           </a:xfrm>
           <a:prstGeom prst="ellipse">
@@ -5016,8 +5016,8 @@
         </p:nvSpPr>
         <p:spPr>
           <a:xfrm>
-            <a:off x="914400" y="1801368"/>
-            <a:ext cx="5349240" cy="2377440"/>
+            <a:off x="914400" y="1755648"/>
+            <a:ext cx="10195560" cy="2103120"/>
           </a:xfrm>
           <a:prstGeom prst="rect">
             <a:avLst/>
@@ -5036,7 +5036,7 @@
               <a:buNone/>
             </a:pPr>
             <a:r>
-              <a:rPr lang="en-US" sz="1800" dirty="0">
+              <a:rPr lang="en-US" sz="1600" dirty="0">
                 <a:solidFill>
                   <a:srgbClr val="7FA8C9"/>
                 </a:solidFill>
@@ -5046,7 +5046,7 @@
               </a:rPr>
               <a:t>/** 0 when |value| is within band, else passes value through. */</a:t>
             </a:r>
-            <a:endParaRPr lang="en-US" sz="1800" dirty="0"/>
+            <a:endParaRPr lang="en-US" sz="1600" dirty="0"/>
           </a:p>
           <a:p>
             <a:pPr indent="0" marL="0">
@@ -5056,7 +5056,7 @@
               <a:buNone/>
             </a:pPr>
             <a:r>
-              <a:rPr lang="en-US" sz="1800" dirty="0">
+              <a:rPr lang="en-US" sz="1600" dirty="0">
                 <a:solidFill>
                   <a:srgbClr val="FFD166"/>
                 </a:solidFill>
@@ -5066,7 +5066,7 @@
               </a:rPr>
               <a:t>private double applyDeadband(double value, double band) {</a:t>
             </a:r>
-            <a:endParaRPr lang="en-US" sz="1800" dirty="0"/>
+            <a:endParaRPr lang="en-US" sz="1600" dirty="0"/>
           </a:p>
           <a:p>
             <a:pPr indent="0" marL="0">
@@ -5076,7 +5076,7 @@
               <a:buNone/>
             </a:pPr>
             <a:r>
-              <a:rPr lang="en-US" sz="1800" dirty="0">
+              <a:rPr lang="en-US" sz="1600" dirty="0">
                 <a:solidFill>
                   <a:srgbClr val="D7E3F4"/>
                 </a:solidFill>
@@ -5086,7 +5086,7 @@
               </a:rPr>
               <a:t>  if (Math.abs(value) &lt; band) {</a:t>
             </a:r>
-            <a:endParaRPr lang="en-US" sz="1800" dirty="0"/>
+            <a:endParaRPr lang="en-US" sz="1600" dirty="0"/>
           </a:p>
           <a:p>
             <a:pPr indent="0" marL="0">
@@ -5096,7 +5096,7 @@
               <a:buNone/>
             </a:pPr>
             <a:r>
-              <a:rPr lang="en-US" sz="1800" dirty="0">
+              <a:rPr lang="en-US" sz="1600" dirty="0">
                 <a:solidFill>
                   <a:srgbClr val="D7E3F4"/>
                 </a:solidFill>
@@ -5106,7 +5106,7 @@
               </a:rPr>
               <a:t>    return 0.0;</a:t>
             </a:r>
-            <a:endParaRPr lang="en-US" sz="1800" dirty="0"/>
+            <a:endParaRPr lang="en-US" sz="1600" dirty="0"/>
           </a:p>
           <a:p>
             <a:pPr indent="0" marL="0">
@@ -5116,7 +5116,7 @@
               <a:buNone/>
             </a:pPr>
             <a:r>
-              <a:rPr lang="en-US" sz="1800" dirty="0">
+              <a:rPr lang="en-US" sz="1600" dirty="0">
                 <a:solidFill>
                   <a:srgbClr val="D7E3F4"/>
                 </a:solidFill>
@@ -5126,7 +5126,7 @@
               </a:rPr>
               <a:t>  }</a:t>
             </a:r>
-            <a:endParaRPr lang="en-US" sz="1800" dirty="0"/>
+            <a:endParaRPr lang="en-US" sz="1600" dirty="0"/>
           </a:p>
           <a:p>
             <a:pPr indent="0" marL="0">
@@ -5136,7 +5136,7 @@
               <a:buNone/>
             </a:pPr>
             <a:r>
-              <a:rPr lang="en-US" sz="1800" dirty="0">
+              <a:rPr lang="en-US" sz="1600" dirty="0">
                 <a:solidFill>
                   <a:srgbClr val="D7E3F4"/>
                 </a:solidFill>
@@ -5146,7 +5146,7 @@
               </a:rPr>
               <a:t>  return value;</a:t>
             </a:r>
-            <a:endParaRPr lang="en-US" sz="1800" dirty="0"/>
+            <a:endParaRPr lang="en-US" sz="1600" dirty="0"/>
           </a:p>
           <a:p>
             <a:pPr indent="0" marL="0">
@@ -5156,7 +5156,7 @@
               <a:buNone/>
             </a:pPr>
             <a:r>
-              <a:rPr lang="en-US" sz="1800" dirty="0">
+              <a:rPr lang="en-US" sz="1600" dirty="0">
                 <a:solidFill>
                   <a:srgbClr val="D7E3F4"/>
                 </a:solidFill>
@@ -5166,7 +5166,7 @@
               </a:rPr>
               <a:t>}</a:t>
             </a:r>
-            <a:endParaRPr lang="en-US" sz="1800" dirty="0"/>
+            <a:endParaRPr lang="en-US" sz="1600" dirty="0"/>
           </a:p>
         </p:txBody>
       </p:sp>
@@ -5178,12 +5178,12 @@
         </p:nvSpPr>
         <p:spPr>
           <a:xfrm>
-            <a:off x="6858000" y="1600200"/>
-            <a:ext cx="4663440" cy="4251960"/>
+            <a:off x="640080" y="4160520"/>
+            <a:ext cx="10881360" cy="2240280"/>
           </a:xfrm>
           <a:prstGeom prst="roundRect">
             <a:avLst>
-              <a:gd name="adj" fmla="val 2151"/>
+              <a:gd name="adj" fmla="val 4082"/>
             </a:avLst>
           </a:prstGeom>
           <a:solidFill>
@@ -5200,8 +5200,8 @@
         </p:nvSpPr>
         <p:spPr>
           <a:xfrm>
-            <a:off x="7132320" y="1874520"/>
-            <a:ext cx="4114800" cy="927100"/>
+            <a:off x="914400" y="4434840"/>
+            <a:ext cx="10332720" cy="577850"/>
           </a:xfrm>
           <a:prstGeom prst="rect">
             <a:avLst/>
@@ -5242,8 +5242,8 @@
         </p:nvSpPr>
         <p:spPr>
           <a:xfrm>
-            <a:off x="7132320" y="2801620"/>
-            <a:ext cx="4114800" cy="2776220"/>
+            <a:off x="914400" y="5012690"/>
+            <a:ext cx="10332720" cy="1113790"/>
           </a:xfrm>
           <a:prstGeom prst="rect">
             <a:avLst/>
@@ -5284,48 +5284,6 @@
         </p:nvSpPr>
         <p:spPr>
           <a:xfrm>
-            <a:off x="640080" y="4526280"/>
-            <a:ext cx="6035040" cy="1463040"/>
-          </a:xfrm>
-          <a:prstGeom prst="rect">
-            <a:avLst/>
-          </a:prstGeom>
-          <a:noFill/>
-          <a:ln/>
-        </p:spPr>
-        <p:txBody>
-          <a:bodyPr wrap="square" lIns="0" tIns="0" rIns="0" bIns="0" rtlCol="0" anchor="t"/>
-          <a:lstStyle/>
-          <a:p>
-            <a:pPr indent="0" marL="0">
-              <a:lnSpc>
-                <a:spcPct val="130000"/>
-              </a:lnSpc>
-              <a:buNone/>
-            </a:pPr>
-            <a:r>
-              <a:rPr lang="en-US" sz="2000" i="1" dirty="0">
-                <a:solidFill>
-                  <a:srgbClr val="5B6B84"/>
-                </a:solidFill>
-                <a:latin typeface="Cambria" pitchFamily="34" charset="0"/>
-                <a:ea typeface="Cambria" pitchFamily="34" charset="-122"/>
-                <a:cs typeface="Cambria" pitchFamily="34" charset="-120"/>
-              </a:rPr>
-              <a:t>WPILib ships MathUtil.applyDeadband(value, band) that does this. You wrote your own so you'd know exactly what's inside it.</a:t>
-            </a:r>
-            <a:endParaRPr lang="en-US" sz="2000" dirty="0"/>
-          </a:p>
-        </p:txBody>
-      </p:sp>
-      <p:sp>
-        <p:nvSpPr>
-          <p:cNvPr id="15" name="Text 12"/>
-          <p:cNvSpPr/>
-          <p:nvPr/>
-        </p:nvSpPr>
-        <p:spPr>
-          <a:xfrm>
             <a:off x="640080" y="6446520"/>
             <a:ext cx="8229600" cy="365760"/>
           </a:xfrm>
@@ -5359,7 +5317,7 @@
       </p:sp>
       <p:sp>
         <p:nvSpPr>
-          <p:cNvPr id="16" name="Text 13"/>
+          <p:cNvPr id="15" name="Text 12"/>
           <p:cNvSpPr/>
           <p:nvPr/>
         </p:nvSpPr>
@@ -5398,7 +5356,7 @@
       </p:sp>
       <p:pic>
         <p:nvPicPr>
-          <p:cNvPr id="17" name="Image 1" descr="/home/user/BasicRobotLessons/docs/presentations/v3/template/assets/logo/team5010-logo-onwhite.png">    </p:cNvPr>
+          <p:cNvPr id="16" name="Image 1" descr="/home/user/BasicRobotLessons/docs/presentations/v3/template/assets/logo/team5010-logo-onwhite.png">    </p:cNvPr>
           <p:cNvPicPr>
             <a:picLocks noChangeAspect="1"/>
           </p:cNvPicPr>
@@ -5691,7 +5649,7 @@
               <a:buNone/>
             </a:pPr>
             <a:r>
-              <a:rPr lang="en-US" sz="1800" dirty="0">
+              <a:rPr lang="en-US" sz="1400" dirty="0">
                 <a:solidFill>
                   <a:srgbClr val="D7E3F4"/>
                 </a:solidFill>
@@ -5701,7 +5659,7 @@
               </a:rPr>
               <a:t>robot.module.setDefaultCommand(</a:t>
             </a:r>
-            <a:endParaRPr lang="en-US" sz="1800" dirty="0"/>
+            <a:endParaRPr lang="en-US" sz="1400" dirty="0"/>
           </a:p>
           <a:p>
             <a:pPr indent="0" marL="0">
@@ -5711,7 +5669,7 @@
               <a:buNone/>
             </a:pPr>
             <a:r>
-              <a:rPr lang="en-US" sz="1800" dirty="0">
+              <a:rPr lang="en-US" sz="1400" dirty="0">
                 <a:solidFill>
                   <a:srgbClr val="9EF01A"/>
                 </a:solidFill>
@@ -5721,7 +5679,7 @@
               </a:rPr>
               <a:t>    robot.module.driveWithJoystick(() -&gt; -robot.driverController.getLeftY()));</a:t>
             </a:r>
-            <a:endParaRPr lang="en-US" sz="1800" dirty="0"/>
+            <a:endParaRPr lang="en-US" sz="1400" dirty="0"/>
           </a:p>
         </p:txBody>
       </p:sp>
@@ -5825,7 +5783,7 @@
                 <a:ea typeface="Calibri" pitchFamily="34" charset="-122"/>
                 <a:cs typeface="Calibri" pitchFamily="34" charset="-120"/>
               </a:rPr>
-              <a:t>The minus sign matters: on most sticks, pushing forward reads negative. Negating makes "push forward" mean "drive forward." When some other command takes over the module, the default steps aside — and resumes on its own the instant that command finishes. You never write that hand-off.</a:t>
+              <a:t>The minus sign matters: on most sticks, pushing forward reads negative. Negating makes "push forward" mean "drive forward." When another command takes the module, the default steps aside, and resumes the instant it finishes.</a:t>
             </a:r>
             <a:endParaRPr lang="en-US" sz="2000" dirty="0"/>
           </a:p>

--- a/docs/presentations/v3/02-joystick-control.pptx
+++ b/docs/presentations/v3/02-joystick-control.pptx
@@ -3419,8 +3419,47 @@
         </p:nvSpPr>
         <p:spPr>
           <a:xfrm>
-            <a:off x="914400" y="1801368"/>
-            <a:ext cx="10195560" cy="868680"/>
+            <a:off x="914400" y="1728216"/>
+            <a:ext cx="10195560" cy="292608"/>
+          </a:xfrm>
+          <a:prstGeom prst="rect">
+            <a:avLst/>
+          </a:prstGeom>
+          <a:noFill/>
+          <a:ln/>
+        </p:spPr>
+        <p:txBody>
+          <a:bodyPr wrap="square" lIns="0" tIns="0" rIns="0" bIns="0" rtlCol="0" anchor="ctr"/>
+          <a:lstStyle/>
+          <a:p>
+            <a:pPr indent="0" marL="0">
+              <a:buNone/>
+            </a:pPr>
+            <a:r>
+              <a:rPr lang="en-US" sz="1500" i="1" dirty="0">
+                <a:solidFill>
+                  <a:srgbClr val="7FA8C9"/>
+                </a:solidFill>
+                <a:latin typeface="Calibri" pitchFamily="34" charset="0"/>
+                <a:ea typeface="Calibri" pitchFamily="34" charset="-122"/>
+                <a:cs typeface="Calibri" pitchFamily="34" charset="-120"/>
+              </a:rPr>
+              <a:t>Nothing to add — this is just how you read one</a:t>
+            </a:r>
+            <a:endParaRPr lang="en-US" sz="1500" dirty="0"/>
+          </a:p>
+        </p:txBody>
+      </p:sp>
+      <p:sp>
+        <p:nvSpPr>
+          <p:cNvPr id="11" name="Text 8"/>
+          <p:cNvSpPr/>
+          <p:nvPr/>
+        </p:nvSpPr>
+        <p:spPr>
+          <a:xfrm>
+            <a:off x="914400" y="2057400"/>
+            <a:ext cx="10195560" cy="576072"/>
           </a:xfrm>
           <a:prstGeom prst="rect">
             <a:avLst/>
@@ -3455,7 +3494,7 @@
       </p:sp>
       <p:sp>
         <p:nvSpPr>
-          <p:cNvPr id="11" name="Shape 8"/>
+          <p:cNvPr id="12" name="Shape 9"/>
           <p:cNvSpPr/>
           <p:nvPr/>
         </p:nvSpPr>
@@ -3477,7 +3516,7 @@
       </p:sp>
       <p:sp>
         <p:nvSpPr>
-          <p:cNvPr id="12" name="Text 9"/>
+          <p:cNvPr id="13" name="Text 10"/>
           <p:cNvSpPr/>
           <p:nvPr/>
         </p:nvSpPr>
@@ -3519,7 +3558,7 @@
       </p:sp>
       <p:sp>
         <p:nvSpPr>
-          <p:cNvPr id="13" name="Text 10"/>
+          <p:cNvPr id="14" name="Text 11"/>
           <p:cNvSpPr/>
           <p:nvPr/>
         </p:nvSpPr>
@@ -3561,7 +3600,7 @@
       </p:sp>
       <p:sp>
         <p:nvSpPr>
-          <p:cNvPr id="14" name="Text 11"/>
+          <p:cNvPr id="15" name="Text 12"/>
           <p:cNvSpPr/>
           <p:nvPr/>
         </p:nvSpPr>
@@ -3600,7 +3639,7 @@
       </p:sp>
       <p:sp>
         <p:nvSpPr>
-          <p:cNvPr id="15" name="Text 12"/>
+          <p:cNvPr id="16" name="Text 13"/>
           <p:cNvSpPr/>
           <p:nvPr/>
         </p:nvSpPr>
@@ -3639,7 +3678,7 @@
       </p:sp>
       <p:pic>
         <p:nvPicPr>
-          <p:cNvPr id="16" name="Image 1" descr="/home/user/BasicRobotLessons/docs/presentations/v3/template/assets/logo/team5010-logo-onwhite.png">    </p:cNvPr>
+          <p:cNvPr id="17" name="Image 1" descr="/home/user/BasicRobotLessons/docs/presentations/v3/template/assets/logo/team5010-logo-onwhite.png">    </p:cNvPr>
           <p:cNvPicPr>
             <a:picLocks noChangeAspect="1"/>
           </p:cNvPicPr>
@@ -3912,8 +3951,47 @@
         </p:nvSpPr>
         <p:spPr>
           <a:xfrm>
-            <a:off x="914400" y="1801368"/>
-            <a:ext cx="10195560" cy="1554480"/>
+            <a:off x="914400" y="1728216"/>
+            <a:ext cx="10195560" cy="292608"/>
+          </a:xfrm>
+          <a:prstGeom prst="rect">
+            <a:avLst/>
+          </a:prstGeom>
+          <a:noFill/>
+          <a:ln/>
+        </p:spPr>
+        <p:txBody>
+          <a:bodyPr wrap="square" lIns="0" tIns="0" rIns="0" bIns="0" rtlCol="0" anchor="ctr"/>
+          <a:lstStyle/>
+          <a:p>
+            <a:pPr indent="0" marL="0">
+              <a:buNone/>
+            </a:pPr>
+            <a:r>
+              <a:rPr lang="en-US" sz="1500" i="1" dirty="0">
+                <a:solidFill>
+                  <a:srgbClr val="7FA8C9"/>
+                </a:solidFill>
+                <a:latin typeface="Calibri" pitchFamily="34" charset="0"/>
+                <a:ea typeface="Calibri" pitchFamily="34" charset="-122"/>
+                <a:cs typeface="Calibri" pitchFamily="34" charset="-120"/>
+              </a:rPr>
+              <a:t>Nothing to add — just an example, not code for any file</a:t>
+            </a:r>
+            <a:endParaRPr lang="en-US" sz="1500" dirty="0"/>
+          </a:p>
+        </p:txBody>
+      </p:sp>
+      <p:sp>
+        <p:nvSpPr>
+          <p:cNvPr id="11" name="Text 8"/>
+          <p:cNvSpPr/>
+          <p:nvPr/>
+        </p:nvSpPr>
+        <p:spPr>
+          <a:xfrm>
+            <a:off x="914400" y="2057400"/>
+            <a:ext cx="10195560" cy="1261872"/>
           </a:xfrm>
           <a:prstGeom prst="rect">
             <a:avLst/>
@@ -3968,7 +4046,7 @@
       </p:sp>
       <p:sp>
         <p:nvSpPr>
-          <p:cNvPr id="11" name="Shape 8"/>
+          <p:cNvPr id="12" name="Shape 9"/>
           <p:cNvSpPr/>
           <p:nvPr/>
         </p:nvSpPr>
@@ -3990,7 +4068,7 @@
       </p:sp>
       <p:sp>
         <p:nvSpPr>
-          <p:cNvPr id="12" name="Text 9"/>
+          <p:cNvPr id="13" name="Text 10"/>
           <p:cNvSpPr/>
           <p:nvPr/>
         </p:nvSpPr>
@@ -4032,7 +4110,7 @@
       </p:sp>
       <p:sp>
         <p:nvSpPr>
-          <p:cNvPr id="13" name="Text 10"/>
+          <p:cNvPr id="14" name="Text 11"/>
           <p:cNvSpPr/>
           <p:nvPr/>
         </p:nvSpPr>
@@ -4074,7 +4152,7 @@
       </p:sp>
       <p:sp>
         <p:nvSpPr>
-          <p:cNvPr id="14" name="Text 11"/>
+          <p:cNvPr id="15" name="Text 12"/>
           <p:cNvSpPr/>
           <p:nvPr/>
         </p:nvSpPr>
@@ -4113,7 +4191,7 @@
       </p:sp>
       <p:sp>
         <p:nvSpPr>
-          <p:cNvPr id="15" name="Text 12"/>
+          <p:cNvPr id="16" name="Text 13"/>
           <p:cNvSpPr/>
           <p:nvPr/>
         </p:nvSpPr>
@@ -4152,7 +4230,7 @@
       </p:sp>
       <p:pic>
         <p:nvPicPr>
-          <p:cNvPr id="16" name="Image 1" descr="/home/user/BasicRobotLessons/docs/presentations/v3/template/assets/logo/team5010-logo-onwhite.png">    </p:cNvPr>
+          <p:cNvPr id="17" name="Image 1" descr="/home/user/BasicRobotLessons/docs/presentations/v3/template/assets/logo/team5010-logo-onwhite.png">    </p:cNvPr>
           <p:cNvPicPr>
             <a:picLocks noChangeAspect="1"/>
           </p:cNvPicPr>
@@ -4337,11 +4415,11 @@
         <p:spPr>
           <a:xfrm>
             <a:off x="640080" y="1600200"/>
-            <a:ext cx="10881360" cy="2651760"/>
+            <a:ext cx="10881360" cy="2788920"/>
           </a:xfrm>
           <a:prstGeom prst="roundRect">
             <a:avLst>
-              <a:gd name="adj" fmla="val 4138"/>
+              <a:gd name="adj" fmla="val 3934"/>
             </a:avLst>
           </a:prstGeom>
           <a:solidFill>
@@ -4425,8 +4503,47 @@
         </p:nvSpPr>
         <p:spPr>
           <a:xfrm>
-            <a:off x="914400" y="1801368"/>
-            <a:ext cx="10195560" cy="2286000"/>
+            <a:off x="914400" y="1728216"/>
+            <a:ext cx="10195560" cy="292608"/>
+          </a:xfrm>
+          <a:prstGeom prst="rect">
+            <a:avLst/>
+          </a:prstGeom>
+          <a:noFill/>
+          <a:ln/>
+        </p:spPr>
+        <p:txBody>
+          <a:bodyPr wrap="square" lIns="0" tIns="0" rIns="0" bIns="0" rtlCol="0" anchor="ctr"/>
+          <a:lstStyle/>
+          <a:p>
+            <a:pPr indent="0" marL="0">
+              <a:buNone/>
+            </a:pPr>
+            <a:r>
+              <a:rPr lang="en-US" sz="1500" b="1" dirty="0">
+                <a:solidFill>
+                  <a:srgbClr val="FF5010"/>
+                </a:solidFill>
+                <a:latin typeface="Calibri" pitchFamily="34" charset="0"/>
+                <a:ea typeface="Calibri" pitchFamily="34" charset="-122"/>
+                <a:cs typeface="Calibri" pitchFamily="34" charset="-120"/>
+              </a:rPr>
+              <a:t>Add to DriveModule, below driveAtSpeed</a:t>
+            </a:r>
+            <a:endParaRPr lang="en-US" sz="1500" dirty="0"/>
+          </a:p>
+        </p:txBody>
+      </p:sp>
+      <p:sp>
+        <p:nvSpPr>
+          <p:cNvPr id="11" name="Text 8"/>
+          <p:cNvSpPr/>
+          <p:nvPr/>
+        </p:nvSpPr>
+        <p:spPr>
+          <a:xfrm>
+            <a:off x="914400" y="2057400"/>
+            <a:ext cx="10195560" cy="2130552"/>
           </a:xfrm>
           <a:prstGeom prst="rect">
             <a:avLst/>
@@ -4445,7 +4562,7 @@
               <a:buNone/>
             </a:pPr>
             <a:r>
-              <a:rPr lang="en-US" sz="1400" dirty="0">
+              <a:rPr lang="en-US" sz="1300" dirty="0">
                 <a:solidFill>
                   <a:srgbClr val="7FA8C9"/>
                 </a:solidFill>
@@ -4455,7 +4572,7 @@
               </a:rPr>
               <a:t>/** Drives continuously using a live speed source (e.g. a joystick axis). */</a:t>
             </a:r>
-            <a:endParaRPr lang="en-US" sz="1400" dirty="0"/>
+            <a:endParaRPr lang="en-US" sz="1300" dirty="0"/>
           </a:p>
           <a:p>
             <a:pPr indent="0" marL="0">
@@ -4465,7 +4582,7 @@
               <a:buNone/>
             </a:pPr>
             <a:r>
-              <a:rPr lang="en-US" sz="1400" dirty="0">
+              <a:rPr lang="en-US" sz="1300" dirty="0">
                 <a:solidFill>
                   <a:srgbClr val="FFD166"/>
                 </a:solidFill>
@@ -4475,7 +4592,7 @@
               </a:rPr>
               <a:t>public Command driveWithJoystick(DoubleSupplier speedSupplier) {</a:t>
             </a:r>
-            <a:endParaRPr lang="en-US" sz="1400" dirty="0"/>
+            <a:endParaRPr lang="en-US" sz="1300" dirty="0"/>
           </a:p>
           <a:p>
             <a:pPr indent="0" marL="0">
@@ -4485,7 +4602,7 @@
               <a:buNone/>
             </a:pPr>
             <a:r>
-              <a:rPr lang="en-US" sz="1400" dirty="0">
+              <a:rPr lang="en-US" sz="1300" dirty="0">
                 <a:solidFill>
                   <a:srgbClr val="D7E3F4"/>
                 </a:solidFill>
@@ -4495,7 +4612,7 @@
               </a:rPr>
               <a:t>  return runRepeatedly(() -&gt; {</a:t>
             </a:r>
-            <a:endParaRPr lang="en-US" sz="1400" dirty="0"/>
+            <a:endParaRPr lang="en-US" sz="1300" dirty="0"/>
           </a:p>
           <a:p>
             <a:pPr indent="0" marL="0">
@@ -4505,7 +4622,7 @@
               <a:buNone/>
             </a:pPr>
             <a:r>
-              <a:rPr lang="en-US" sz="1400" dirty="0">
+              <a:rPr lang="en-US" sz="1300" dirty="0">
                 <a:solidFill>
                   <a:srgbClr val="D7E3F4"/>
                 </a:solidFill>
@@ -4515,7 +4632,7 @@
               </a:rPr>
               <a:t>    double raw = speedSupplier.getAsDouble();   // fetch fresh value this tick</a:t>
             </a:r>
-            <a:endParaRPr lang="en-US" sz="1400" dirty="0"/>
+            <a:endParaRPr lang="en-US" sz="1300" dirty="0"/>
           </a:p>
           <a:p>
             <a:pPr indent="0" marL="0">
@@ -4525,7 +4642,7 @@
               <a:buNone/>
             </a:pPr>
             <a:r>
-              <a:rPr lang="en-US" sz="1400" dirty="0">
+              <a:rPr lang="en-US" sz="1300" dirty="0">
                 <a:solidFill>
                   <a:srgbClr val="D7E3F4"/>
                 </a:solidFill>
@@ -4535,7 +4652,7 @@
               </a:rPr>
               <a:t>    double speed = applyDeadband(raw, 0.1);     // clean it up</a:t>
             </a:r>
-            <a:endParaRPr lang="en-US" sz="1400" dirty="0"/>
+            <a:endParaRPr lang="en-US" sz="1300" dirty="0"/>
           </a:p>
           <a:p>
             <a:pPr indent="0" marL="0">
@@ -4545,7 +4662,7 @@
               <a:buNone/>
             </a:pPr>
             <a:r>
-              <a:rPr lang="en-US" sz="1400" dirty="0">
+              <a:rPr lang="en-US" sz="1300" dirty="0">
                 <a:solidFill>
                   <a:srgbClr val="D7E3F4"/>
                 </a:solidFill>
@@ -4555,7 +4672,7 @@
               </a:rPr>
               <a:t>    m_driveMotor.setThrottle(speed);</a:t>
             </a:r>
-            <a:endParaRPr lang="en-US" sz="1400" dirty="0"/>
+            <a:endParaRPr lang="en-US" sz="1300" dirty="0"/>
           </a:p>
           <a:p>
             <a:pPr indent="0" marL="0">
@@ -4565,7 +4682,7 @@
               <a:buNone/>
             </a:pPr>
             <a:r>
-              <a:rPr lang="en-US" sz="1400" dirty="0">
+              <a:rPr lang="en-US" sz="1300" dirty="0">
                 <a:solidFill>
                   <a:srgbClr val="9EF01A"/>
                 </a:solidFill>
@@ -4575,7 +4692,7 @@
               </a:rPr>
               <a:t>  }).named("Drive With Joystick");</a:t>
             </a:r>
-            <a:endParaRPr lang="en-US" sz="1400" dirty="0"/>
+            <a:endParaRPr lang="en-US" sz="1300" dirty="0"/>
           </a:p>
           <a:p>
             <a:pPr indent="0" marL="0">
@@ -4585,7 +4702,7 @@
               <a:buNone/>
             </a:pPr>
             <a:r>
-              <a:rPr lang="en-US" sz="1400" dirty="0">
+              <a:rPr lang="en-US" sz="1300" dirty="0">
                 <a:solidFill>
                   <a:srgbClr val="D7E3F4"/>
                 </a:solidFill>
@@ -4595,13 +4712,13 @@
               </a:rPr>
               <a:t>}</a:t>
             </a:r>
-            <a:endParaRPr lang="en-US" sz="1400" dirty="0"/>
-          </a:p>
-        </p:txBody>
-      </p:sp>
-      <p:sp>
-        <p:nvSpPr>
-          <p:cNvPr id="11" name="Shape 8"/>
+            <a:endParaRPr lang="en-US" sz="1300" dirty="0"/>
+          </a:p>
+        </p:txBody>
+      </p:sp>
+      <p:sp>
+        <p:nvSpPr>
+          <p:cNvPr id="12" name="Shape 9"/>
           <p:cNvSpPr/>
           <p:nvPr/>
         </p:nvSpPr>
@@ -4623,7 +4740,7 @@
       </p:sp>
       <p:sp>
         <p:nvSpPr>
-          <p:cNvPr id="12" name="Text 9"/>
+          <p:cNvPr id="13" name="Text 10"/>
           <p:cNvSpPr/>
           <p:nvPr/>
         </p:nvSpPr>
@@ -4665,7 +4782,7 @@
       </p:sp>
       <p:sp>
         <p:nvSpPr>
-          <p:cNvPr id="13" name="Text 10"/>
+          <p:cNvPr id="14" name="Text 11"/>
           <p:cNvSpPr/>
           <p:nvPr/>
         </p:nvSpPr>
@@ -4704,7 +4821,7 @@
       </p:sp>
       <p:sp>
         <p:nvSpPr>
-          <p:cNvPr id="14" name="Text 11"/>
+          <p:cNvPr id="15" name="Text 12"/>
           <p:cNvSpPr/>
           <p:nvPr/>
         </p:nvSpPr>
@@ -4743,7 +4860,7 @@
       </p:sp>
       <p:pic>
         <p:nvPicPr>
-          <p:cNvPr id="15" name="Image 1" descr="/home/user/BasicRobotLessons/docs/presentations/v3/template/assets/logo/team5010-logo-onwhite.png">    </p:cNvPr>
+          <p:cNvPr id="16" name="Image 1" descr="/home/user/BasicRobotLessons/docs/presentations/v3/template/assets/logo/team5010-logo-onwhite.png">    </p:cNvPr>
           <p:cNvPicPr>
             <a:picLocks noChangeAspect="1"/>
           </p:cNvPicPr>
@@ -4928,11 +5045,11 @@
         <p:spPr>
           <a:xfrm>
             <a:off x="640080" y="1554480"/>
-            <a:ext cx="10881360" cy="2468880"/>
+            <a:ext cx="10881360" cy="2606040"/>
           </a:xfrm>
           <a:prstGeom prst="roundRect">
             <a:avLst>
-              <a:gd name="adj" fmla="val 4444"/>
+              <a:gd name="adj" fmla="val 4211"/>
             </a:avLst>
           </a:prstGeom>
           <a:solidFill>
@@ -5016,8 +5133,47 @@
         </p:nvSpPr>
         <p:spPr>
           <a:xfrm>
-            <a:off x="914400" y="1755648"/>
-            <a:ext cx="10195560" cy="2103120"/>
+            <a:off x="914400" y="1682496"/>
+            <a:ext cx="10195560" cy="292608"/>
+          </a:xfrm>
+          <a:prstGeom prst="rect">
+            <a:avLst/>
+          </a:prstGeom>
+          <a:noFill/>
+          <a:ln/>
+        </p:spPr>
+        <p:txBody>
+          <a:bodyPr wrap="square" lIns="0" tIns="0" rIns="0" bIns="0" rtlCol="0" anchor="ctr"/>
+          <a:lstStyle/>
+          <a:p>
+            <a:pPr indent="0" marL="0">
+              <a:buNone/>
+            </a:pPr>
+            <a:r>
+              <a:rPr lang="en-US" sz="1500" b="1" dirty="0">
+                <a:solidFill>
+                  <a:srgbClr val="FF5010"/>
+                </a:solidFill>
+                <a:latin typeface="Calibri" pitchFamily="34" charset="0"/>
+                <a:ea typeface="Calibri" pitchFamily="34" charset="-122"/>
+                <a:cs typeface="Calibri" pitchFamily="34" charset="-120"/>
+              </a:rPr>
+              <a:t>Add to DriveModule, below driveWithJoystick</a:t>
+            </a:r>
+            <a:endParaRPr lang="en-US" sz="1500" dirty="0"/>
+          </a:p>
+        </p:txBody>
+      </p:sp>
+      <p:sp>
+        <p:nvSpPr>
+          <p:cNvPr id="11" name="Text 8"/>
+          <p:cNvSpPr/>
+          <p:nvPr/>
+        </p:nvSpPr>
+        <p:spPr>
+          <a:xfrm>
+            <a:off x="914400" y="2011680"/>
+            <a:ext cx="10195560" cy="1947672"/>
           </a:xfrm>
           <a:prstGeom prst="rect">
             <a:avLst/>
@@ -5036,7 +5192,7 @@
               <a:buNone/>
             </a:pPr>
             <a:r>
-              <a:rPr lang="en-US" sz="1600" dirty="0">
+              <a:rPr lang="en-US" sz="1400" dirty="0">
                 <a:solidFill>
                   <a:srgbClr val="7FA8C9"/>
                 </a:solidFill>
@@ -5046,7 +5202,7 @@
               </a:rPr>
               <a:t>/** 0 when |value| is within band, else passes value through. */</a:t>
             </a:r>
-            <a:endParaRPr lang="en-US" sz="1600" dirty="0"/>
+            <a:endParaRPr lang="en-US" sz="1400" dirty="0"/>
           </a:p>
           <a:p>
             <a:pPr indent="0" marL="0">
@@ -5056,7 +5212,7 @@
               <a:buNone/>
             </a:pPr>
             <a:r>
-              <a:rPr lang="en-US" sz="1600" dirty="0">
+              <a:rPr lang="en-US" sz="1400" dirty="0">
                 <a:solidFill>
                   <a:srgbClr val="FFD166"/>
                 </a:solidFill>
@@ -5066,7 +5222,7 @@
               </a:rPr>
               <a:t>private double applyDeadband(double value, double band) {</a:t>
             </a:r>
-            <a:endParaRPr lang="en-US" sz="1600" dirty="0"/>
+            <a:endParaRPr lang="en-US" sz="1400" dirty="0"/>
           </a:p>
           <a:p>
             <a:pPr indent="0" marL="0">
@@ -5076,7 +5232,7 @@
               <a:buNone/>
             </a:pPr>
             <a:r>
-              <a:rPr lang="en-US" sz="1600" dirty="0">
+              <a:rPr lang="en-US" sz="1400" dirty="0">
                 <a:solidFill>
                   <a:srgbClr val="D7E3F4"/>
                 </a:solidFill>
@@ -5086,7 +5242,7 @@
               </a:rPr>
               <a:t>  if (Math.abs(value) &lt; band) {</a:t>
             </a:r>
-            <a:endParaRPr lang="en-US" sz="1600" dirty="0"/>
+            <a:endParaRPr lang="en-US" sz="1400" dirty="0"/>
           </a:p>
           <a:p>
             <a:pPr indent="0" marL="0">
@@ -5096,7 +5252,7 @@
               <a:buNone/>
             </a:pPr>
             <a:r>
-              <a:rPr lang="en-US" sz="1600" dirty="0">
+              <a:rPr lang="en-US" sz="1400" dirty="0">
                 <a:solidFill>
                   <a:srgbClr val="D7E3F4"/>
                 </a:solidFill>
@@ -5106,7 +5262,7 @@
               </a:rPr>
               <a:t>    return 0.0;</a:t>
             </a:r>
-            <a:endParaRPr lang="en-US" sz="1600" dirty="0"/>
+            <a:endParaRPr lang="en-US" sz="1400" dirty="0"/>
           </a:p>
           <a:p>
             <a:pPr indent="0" marL="0">
@@ -5116,7 +5272,7 @@
               <a:buNone/>
             </a:pPr>
             <a:r>
-              <a:rPr lang="en-US" sz="1600" dirty="0">
+              <a:rPr lang="en-US" sz="1400" dirty="0">
                 <a:solidFill>
                   <a:srgbClr val="D7E3F4"/>
                 </a:solidFill>
@@ -5126,7 +5282,7 @@
               </a:rPr>
               <a:t>  }</a:t>
             </a:r>
-            <a:endParaRPr lang="en-US" sz="1600" dirty="0"/>
+            <a:endParaRPr lang="en-US" sz="1400" dirty="0"/>
           </a:p>
           <a:p>
             <a:pPr indent="0" marL="0">
@@ -5136,7 +5292,7 @@
               <a:buNone/>
             </a:pPr>
             <a:r>
-              <a:rPr lang="en-US" sz="1600" dirty="0">
+              <a:rPr lang="en-US" sz="1400" dirty="0">
                 <a:solidFill>
                   <a:srgbClr val="D7E3F4"/>
                 </a:solidFill>
@@ -5146,7 +5302,7 @@
               </a:rPr>
               <a:t>  return value;</a:t>
             </a:r>
-            <a:endParaRPr lang="en-US" sz="1600" dirty="0"/>
+            <a:endParaRPr lang="en-US" sz="1400" dirty="0"/>
           </a:p>
           <a:p>
             <a:pPr indent="0" marL="0">
@@ -5156,7 +5312,7 @@
               <a:buNone/>
             </a:pPr>
             <a:r>
-              <a:rPr lang="en-US" sz="1600" dirty="0">
+              <a:rPr lang="en-US" sz="1400" dirty="0">
                 <a:solidFill>
                   <a:srgbClr val="D7E3F4"/>
                 </a:solidFill>
@@ -5166,24 +5322,24 @@
               </a:rPr>
               <a:t>}</a:t>
             </a:r>
-            <a:endParaRPr lang="en-US" sz="1600" dirty="0"/>
-          </a:p>
-        </p:txBody>
-      </p:sp>
-      <p:sp>
-        <p:nvSpPr>
-          <p:cNvPr id="11" name="Shape 8"/>
-          <p:cNvSpPr/>
-          <p:nvPr/>
-        </p:nvSpPr>
-        <p:spPr>
-          <a:xfrm>
-            <a:off x="640080" y="4160520"/>
-            <a:ext cx="10881360" cy="2240280"/>
+            <a:endParaRPr lang="en-US" sz="1400" dirty="0"/>
+          </a:p>
+        </p:txBody>
+      </p:sp>
+      <p:sp>
+        <p:nvSpPr>
+          <p:cNvPr id="12" name="Shape 9"/>
+          <p:cNvSpPr/>
+          <p:nvPr/>
+        </p:nvSpPr>
+        <p:spPr>
+          <a:xfrm>
+            <a:off x="640080" y="4343400"/>
+            <a:ext cx="10881360" cy="1965960"/>
           </a:xfrm>
           <a:prstGeom prst="roundRect">
             <a:avLst>
-              <a:gd name="adj" fmla="val 4082"/>
+              <a:gd name="adj" fmla="val 4651"/>
             </a:avLst>
           </a:prstGeom>
           <a:solidFill>
@@ -5194,13 +5350,13 @@
       </p:sp>
       <p:sp>
         <p:nvSpPr>
-          <p:cNvPr id="12" name="Text 9"/>
-          <p:cNvSpPr/>
-          <p:nvPr/>
-        </p:nvSpPr>
-        <p:spPr>
-          <a:xfrm>
-            <a:off x="914400" y="4434840"/>
+          <p:cNvPr id="13" name="Text 10"/>
+          <p:cNvSpPr/>
+          <p:nvPr/>
+        </p:nvSpPr>
+        <p:spPr>
+          <a:xfrm>
+            <a:off x="914400" y="4617720"/>
             <a:ext cx="10332720" cy="577850"/>
           </a:xfrm>
           <a:prstGeom prst="rect">
@@ -5236,14 +5392,14 @@
       </p:sp>
       <p:sp>
         <p:nvSpPr>
-          <p:cNvPr id="13" name="Text 10"/>
-          <p:cNvSpPr/>
-          <p:nvPr/>
-        </p:nvSpPr>
-        <p:spPr>
-          <a:xfrm>
-            <a:off x="914400" y="5012690"/>
-            <a:ext cx="10332720" cy="1113790"/>
+          <p:cNvPr id="14" name="Text 11"/>
+          <p:cNvSpPr/>
+          <p:nvPr/>
+        </p:nvSpPr>
+        <p:spPr>
+          <a:xfrm>
+            <a:off x="914400" y="5195570"/>
+            <a:ext cx="10332720" cy="839470"/>
           </a:xfrm>
           <a:prstGeom prst="rect">
             <a:avLst/>
@@ -5270,7 +5426,7 @@
                 <a:ea typeface="Calibri" pitchFamily="34" charset="-122"/>
                 <a:cs typeface="Calibri" pitchFamily="34" charset="-120"/>
               </a:rPr>
-              <a:t>if (condition) { ... } runs its block only when true. Math.abs(value) drops the sign, so one check covers forward and reverse. return hands a value back and stops the method on the spot.</a:t>
+              <a:t>if (condition) {...} runs only when true. Math.abs(value) drops the sign, covering both directions with one check. return hands back a value and exits.</a:t>
             </a:r>
             <a:endParaRPr lang="en-US" sz="2000" dirty="0"/>
           </a:p>
@@ -5278,7 +5434,7 @@
       </p:sp>
       <p:sp>
         <p:nvSpPr>
-          <p:cNvPr id="14" name="Text 11"/>
+          <p:cNvPr id="15" name="Text 12"/>
           <p:cNvSpPr/>
           <p:nvPr/>
         </p:nvSpPr>
@@ -5317,7 +5473,7 @@
       </p:sp>
       <p:sp>
         <p:nvSpPr>
-          <p:cNvPr id="15" name="Text 12"/>
+          <p:cNvPr id="16" name="Text 13"/>
           <p:cNvSpPr/>
           <p:nvPr/>
         </p:nvSpPr>
@@ -5356,7 +5512,7 @@
       </p:sp>
       <p:pic>
         <p:nvPicPr>
-          <p:cNvPr id="16" name="Image 1" descr="/home/user/BasicRobotLessons/docs/presentations/v3/template/assets/logo/team5010-logo-onwhite.png">    </p:cNvPr>
+          <p:cNvPr id="17" name="Image 1" descr="/home/user/BasicRobotLessons/docs/presentations/v3/template/assets/logo/team5010-logo-onwhite.png">    </p:cNvPr>
           <p:cNvPicPr>
             <a:picLocks noChangeAspect="1"/>
           </p:cNvPicPr>
@@ -5541,11 +5697,11 @@
         <p:spPr>
           <a:xfrm>
             <a:off x="640080" y="1600200"/>
-            <a:ext cx="10881360" cy="1600200"/>
+            <a:ext cx="10881360" cy="1874520"/>
           </a:xfrm>
           <a:prstGeom prst="roundRect">
             <a:avLst>
-              <a:gd name="adj" fmla="val 6857"/>
+              <a:gd name="adj" fmla="val 5854"/>
             </a:avLst>
           </a:prstGeom>
           <a:solidFill>
@@ -5629,8 +5785,47 @@
         </p:nvSpPr>
         <p:spPr>
           <a:xfrm>
-            <a:off x="914400" y="1801368"/>
-            <a:ext cx="10195560" cy="1234440"/>
+            <a:off x="914400" y="1728216"/>
+            <a:ext cx="10195560" cy="292608"/>
+          </a:xfrm>
+          <a:prstGeom prst="rect">
+            <a:avLst/>
+          </a:prstGeom>
+          <a:noFill/>
+          <a:ln/>
+        </p:spPr>
+        <p:txBody>
+          <a:bodyPr wrap="square" lIns="0" tIns="0" rIns="0" bIns="0" rtlCol="0" anchor="ctr"/>
+          <a:lstStyle/>
+          <a:p>
+            <a:pPr indent="0" marL="0">
+              <a:buNone/>
+            </a:pPr>
+            <a:r>
+              <a:rPr lang="en-US" sz="1500" b="1" dirty="0">
+                <a:solidFill>
+                  <a:srgbClr val="FF5010"/>
+                </a:solidFill>
+                <a:latin typeface="Calibri" pitchFamily="34" charset="0"/>
+                <a:ea typeface="Calibri" pitchFamily="34" charset="-122"/>
+                <a:cs typeface="Calibri" pitchFamily="34" charset="-120"/>
+              </a:rPr>
+              <a:t>Edit MyTeleop's constructor</a:t>
+            </a:r>
+            <a:endParaRPr lang="en-US" sz="1500" dirty="0"/>
+          </a:p>
+        </p:txBody>
+      </p:sp>
+      <p:sp>
+        <p:nvSpPr>
+          <p:cNvPr id="11" name="Text 8"/>
+          <p:cNvSpPr/>
+          <p:nvPr/>
+        </p:nvSpPr>
+        <p:spPr>
+          <a:xfrm>
+            <a:off x="914400" y="2057400"/>
+            <a:ext cx="10195560" cy="1216152"/>
           </a:xfrm>
           <a:prstGeom prst="rect">
             <a:avLst/>
@@ -5685,18 +5880,18 @@
       </p:sp>
       <p:sp>
         <p:nvSpPr>
-          <p:cNvPr id="11" name="Shape 8"/>
-          <p:cNvSpPr/>
-          <p:nvPr/>
-        </p:nvSpPr>
-        <p:spPr>
-          <a:xfrm>
-            <a:off x="640080" y="3429000"/>
-            <a:ext cx="10881360" cy="2788920"/>
+          <p:cNvPr id="12" name="Shape 9"/>
+          <p:cNvSpPr/>
+          <p:nvPr/>
+        </p:nvSpPr>
+        <p:spPr>
+          <a:xfrm>
+            <a:off x="640080" y="3657600"/>
+            <a:ext cx="10881360" cy="2560320"/>
           </a:xfrm>
           <a:prstGeom prst="roundRect">
             <a:avLst>
-              <a:gd name="adj" fmla="val 3279"/>
+              <a:gd name="adj" fmla="val 3571"/>
             </a:avLst>
           </a:prstGeom>
           <a:solidFill>
@@ -5707,13 +5902,13 @@
       </p:sp>
       <p:sp>
         <p:nvSpPr>
-          <p:cNvPr id="12" name="Text 9"/>
-          <p:cNvSpPr/>
-          <p:nvPr/>
-        </p:nvSpPr>
-        <p:spPr>
-          <a:xfrm>
-            <a:off x="914400" y="3703320"/>
+          <p:cNvPr id="13" name="Text 10"/>
+          <p:cNvSpPr/>
+          <p:nvPr/>
+        </p:nvSpPr>
+        <p:spPr>
+          <a:xfrm>
+            <a:off x="914400" y="3931920"/>
             <a:ext cx="10332720" cy="895350"/>
           </a:xfrm>
           <a:prstGeom prst="rect">
@@ -5749,14 +5944,14 @@
       </p:sp>
       <p:sp>
         <p:nvSpPr>
-          <p:cNvPr id="13" name="Text 10"/>
-          <p:cNvSpPr/>
-          <p:nvPr/>
-        </p:nvSpPr>
-        <p:spPr>
-          <a:xfrm>
-            <a:off x="914400" y="4598670"/>
-            <a:ext cx="10332720" cy="1344930"/>
+          <p:cNvPr id="14" name="Text 11"/>
+          <p:cNvSpPr/>
+          <p:nvPr/>
+        </p:nvSpPr>
+        <p:spPr>
+          <a:xfrm>
+            <a:off x="914400" y="4827270"/>
+            <a:ext cx="10332720" cy="1116330"/>
           </a:xfrm>
           <a:prstGeom prst="rect">
             <a:avLst/>
@@ -5791,7 +5986,7 @@
       </p:sp>
       <p:sp>
         <p:nvSpPr>
-          <p:cNvPr id="14" name="Text 11"/>
+          <p:cNvPr id="15" name="Text 12"/>
           <p:cNvSpPr/>
           <p:nvPr/>
         </p:nvSpPr>
@@ -5830,7 +6025,7 @@
       </p:sp>
       <p:sp>
         <p:nvSpPr>
-          <p:cNvPr id="15" name="Text 12"/>
+          <p:cNvPr id="16" name="Text 13"/>
           <p:cNvSpPr/>
           <p:nvPr/>
         </p:nvSpPr>
@@ -5869,7 +6064,7 @@
       </p:sp>
       <p:pic>
         <p:nvPicPr>
-          <p:cNvPr id="16" name="Image 1" descr="/home/user/BasicRobotLessons/docs/presentations/v3/template/assets/logo/team5010-logo-onwhite.png">    </p:cNvPr>
+          <p:cNvPr id="17" name="Image 1" descr="/home/user/BasicRobotLessons/docs/presentations/v3/template/assets/logo/team5010-logo-onwhite.png">    </p:cNvPr>
           <p:cNvPicPr>
             <a:picLocks noChangeAspect="1"/>
           </p:cNvPicPr>

--- a/docs/presentations/v3/02-joystick-control.pptx
+++ b/docs/presentations/v3/02-joystick-control.pptx
@@ -511,7 +511,7 @@
           <a:p>
             <a:r>
               <a:rPr lang="en-US" dirty="0"/>
-              <a:t/>
+              <a:t>This lesson replaces Lesson 1's fixed 0.3 with a live joystick reading — the first time a command reads something that changes continuously instead of a value baked in at compile time.</a:t>
             </a:r>
             <a:endParaRPr lang="en-US" dirty="0"/>
           </a:p>
@@ -599,7 +599,7 @@
           <a:p>
             <a:r>
               <a:rPr lang="en-US" dirty="0"/>
-              <a:t/>
+              <a:t>The big idea this lesson adds is that not every value a command needs is known up front — some of it has to be fetched fresh, tick after tick, and a lambda stored as a DoubleSupplier is how Java lets you pass around "go get the current value" instead of just a value. if, Math.abs, and return are ordinary building blocks, but stacked together they solve a real problem: a joystick that never quite reads zero. And a default command is the first time a mechanism does something without anybody explicitly telling it to on that tick — worth sitting with, because most of the commands still to come will interrupt this one temporarily rather than replace it for good.</a:t>
             </a:r>
             <a:endParaRPr lang="en-US" dirty="0"/>
           </a:p>
@@ -687,7 +687,7 @@
           <a:p>
             <a:r>
               <a:rPr lang="en-US" dirty="0"/>
-              <a:t/>
+              <a:t>Lesson 1 spun the motor at a fixed 0.3 on a button press — the number never changed. This lesson replaces that constant with whatever the joystick axis reads right now, so the motor speed tracks the stick continuously instead of snapping to one value. The deadband exists because a real joystick almost never reports exactly 0.0 at rest — a tiny bit of drift or noise would otherwise make the motor creep even when the driver isn't touching the stick.</a:t>
             </a:r>
             <a:endParaRPr lang="en-US" dirty="0"/>
           </a:p>
@@ -775,7 +775,7 @@
           <a:p>
             <a:r>
               <a:rPr lang="en-US" dirty="0"/>
-              <a:t/>
+              <a:t>getLeftY() returns a double — whatever the stick position was at the exact instant you called it. If you grab that value once when the command is built, it's frozen forever at that reading; the motor would run at whatever speed the stick happened to be at when the code first ran, never updating again. What a repeating command actually needs is a way to ask "what is it right now?" on every single tick — that's the problem a supplier solves, and it's the reason the next two slides build up to DoubleSupplier before touching DriveModule at all.</a:t>
             </a:r>
             <a:endParaRPr lang="en-US" dirty="0"/>
           </a:p>
@@ -863,7 +863,7 @@
           <a:p>
             <a:r>
               <a:rPr lang="en-US" dirty="0"/>
-              <a:t/>
+              <a:t>A lambda — the () -&gt; ... syntax — packages up a little bit of code and hands it around like any other value, the same way 3.7 or a TalonFX object is a value. Nothing inside the lambda runs when you write stickReader = () -&gt; ...; that line just stores the code for later. Calling .getAsDouble() is the moment it actually runs, and it runs fresh every time you call it — that's exactly the "ask again right now" behavior the previous slide was missing. DoubleSupplier is the specific type for "a lambda with no arguments that returns a double"; there are other Supplier types for other return types, but this is the one the joystick axis needs.</a:t>
             </a:r>
             <a:endParaRPr lang="en-US" dirty="0"/>
           </a:p>
@@ -951,7 +951,7 @@
           <a:p>
             <a:r>
               <a:rPr lang="en-US" dirty="0"/>
-              <a:t/>
+              <a:t>driveWithJoystick takes a DoubleSupplier as its parameter instead of a fixed double — that's the whole trick. Every tick, runRepeatedly's lambda calls speedSupplier.getAsDouble() to get a brand-new reading, runs it through applyDeadband, and sends it to the motor. Point out that the lambda body here has multiple statements, which is why it needs curly braces — the single-expression lambda from the previous slide didn't need them. This file won't compile yet on purpose: applyDeadband doesn't exist until the next section, and that's fine — it's a normal part of building up a file piece by piece.</a:t>
             </a:r>
             <a:endParaRPr lang="en-US" dirty="0"/>
           </a:p>
@@ -1039,7 +1039,7 @@
           <a:p>
             <a:r>
               <a:rPr lang="en-US" dirty="0"/>
-              <a:t/>
+              <a:t>This is a private helper method — private because nothing outside DriveModule needs to call it, it exists purely to keep driveWithJoystick readable. Trace an example out loud: applyDeadband(0.03, 0.1) — Math.abs(0.03) is 0.03, which is less than 0.1, so it returns 0.0. applyDeadband(0.6, 0.1) — Math.abs(0.6) is 0.6, not less than 0.1, so it returns 0.6 unchanged. Worth mentioning that WPILib actually ships MathUtil.applyDeadband as a library method that does this exact job — writing it by hand once here is what makes reaching for the built-in one later feel like a shortcut instead of a mystery.</a:t>
             </a:r>
             <a:endParaRPr lang="en-US" dirty="0"/>
           </a:p>
@@ -1127,7 +1127,7 @@
           <a:p>
             <a:r>
               <a:rPr lang="en-US" dirty="0"/>
-              <a:t/>
+              <a:t>Read the binding from the inside out: () -&gt; -robot.driverController.getLeftY() is a lambda — a DoubleSupplier — that reads the stick and flips its sign. That lambda gets passed into driveWithJoystick, which returns a Command, and that Command becomes the module's default. A default command is simply "what runs when nothing else is asking for this mechanism" — driving is the normal state for a drivetrain, so it makes sense as the default rather than something you'd trigger with a button. The scheduler handles the handoff automatically: schedule some other command that requires the module, and the default steps aside for as long as that command runs, then resumes the instant it finishes or is canceled — no code in driveWithJoystick itself has to know that's happening.</a:t>
             </a:r>
             <a:endParaRPr lang="en-US" dirty="0"/>
           </a:p>
@@ -1215,7 +1215,7 @@
           <a:p>
             <a:r>
               <a:rPr lang="en-US" dirty="0"/>
-              <a:t/>
+              <a:t>Nothing needs to be scheduled by hand this time — that's the point of a default command. As soon as the robot enables in teleop, the module is already running driveWithJoystick because no other command has claimed it. Push the stick forward and the motor should spin one direction; pull back and it should reverse; let go and it should settle at exactly zero rather than drifting. If it creeps at rest, the most common cause is that driveWithJoystick isn't actually routing through applyDeadband — double check the call is really there before assuming the deadband math itself is wrong.</a:t>
             </a:r>
             <a:endParaRPr lang="en-US" dirty="0"/>
           </a:p>
@@ -1303,7 +1303,7 @@
           <a:p>
             <a:r>
               <a:rPr lang="en-US" dirty="0"/>
-              <a:t/>
+              <a:t>Slow mode is a good first extension because it reuses everything just built — one more parameter, one more multiply, one more button binding, nothing new conceptually. Squaring the input (speed * Math.abs(speed), not speed * speed) is worth pausing on: ask why Math.abs has to stay in there — squaring alone would always return a positive number and the motor would never reverse, since a negative times a negative is positive. Printing raw vs. deadbanded side by side is the most convincing demo of why the deadband exists at all — students can watch the raw number jitter near zero while the deadbanded one sits rock steady at 0.0.</a:t>
             </a:r>
             <a:endParaRPr lang="en-US" dirty="0"/>
           </a:p>
